--- a/.netCore/Csharp/Chapter 3/Presentation/Exception Handling.pptx
+++ b/.netCore/Csharp/Chapter 3/Presentation/Exception Handling.pptx
@@ -35,17 +35,17 @@
   <p:notesSz cx="6858000" cy="9144000"/>
   <p:embeddedFontLst>
     <p:embeddedFont>
-      <p:font typeface="Bell MT" panose="02020503060305020303" pitchFamily="18" charset="0"/>
+      <p:font typeface="Calibri" panose="020F0502020204030204" pitchFamily="34" charset="0"/>
       <p:regular r:id="rId25"/>
       <p:bold r:id="rId26"/>
       <p:italic r:id="rId27"/>
+      <p:boldItalic r:id="rId28"/>
     </p:embeddedFont>
     <p:embeddedFont>
-      <p:font typeface="Calibri" panose="020F0502020204030204" pitchFamily="34" charset="0"/>
-      <p:regular r:id="rId28"/>
-      <p:bold r:id="rId29"/>
-      <p:italic r:id="rId30"/>
-      <p:boldItalic r:id="rId31"/>
+      <p:font typeface="Bell MT" panose="02020503060305020303" pitchFamily="18" charset="0"/>
+      <p:regular r:id="rId29"/>
+      <p:bold r:id="rId30"/>
+      <p:italic r:id="rId31"/>
     </p:embeddedFont>
   </p:embeddedFontLst>
   <p:defaultTextStyle>
@@ -282,7 +282,7 @@
       <p15:sldGuideLst xmlns:p15="http://schemas.microsoft.com/office/powerpoint/2012/main"/>
     </p:ext>
     <p:ext uri="GoogleSlidesCustomDataVersion2">
-      <go:slidesCustomData xmlns:go="http://customooxmlschemas.google.com/" xmlns:ahyp="http://schemas.microsoft.com/office/drawing/2018/hyperlinkcolor" xmlns:p15="http://schemas.microsoft.com/office/powerpoint/2012/main" xmlns:p14="http://schemas.microsoft.com/office/powerpoint/2010/main" xmlns:com="http://schemas.openxmlformats.org/drawingml/2006/compatibility" xmlns:pvml="urn:schemas-microsoft-com:office:powerpoint" xmlns:v="urn:schemas-microsoft-com:vml" xmlns:o="urn:schemas-microsoft-com:office:office" xmlns:dgm="http://schemas.openxmlformats.org/drawingml/2006/diagram" xmlns:c="http://schemas.openxmlformats.org/drawingml/2006/chart" xmlns:mv="urn:schemas-microsoft-com:mac:vml" xmlns:mc="http://schemas.openxmlformats.org/markup-compatibility/2006" xmlns="" r:id="rId37" roundtripDataSignature="AMtx7mgJ5jrC3kKYGW5ZS42NhkM0VOq3eA=="/>
+      <go:slidesCustomData xmlns="" xmlns:mc="http://schemas.openxmlformats.org/markup-compatibility/2006" xmlns:mv="urn:schemas-microsoft-com:mac:vml" xmlns:c="http://schemas.openxmlformats.org/drawingml/2006/chart" xmlns:dgm="http://schemas.openxmlformats.org/drawingml/2006/diagram" xmlns:o="urn:schemas-microsoft-com:office:office" xmlns:v="urn:schemas-microsoft-com:vml" xmlns:pvml="urn:schemas-microsoft-com:office:powerpoint" xmlns:com="http://schemas.openxmlformats.org/drawingml/2006/compatibility" xmlns:p14="http://schemas.microsoft.com/office/powerpoint/2010/main" xmlns:p15="http://schemas.microsoft.com/office/powerpoint/2012/main" xmlns:ahyp="http://schemas.microsoft.com/office/drawing/2018/hyperlinkcolor" xmlns:go="http://customooxmlschemas.google.com/" r:id="rId37" roundtripDataSignature="AMtx7mgJ5jrC3kKYGW5ZS42NhkM0VOq3eA=="/>
     </p:ext>
   </p:extLst>
 </p:presentation>
@@ -304,7 +304,7 @@
         <p15:threadingInfo xmlns:p15="http://schemas.microsoft.com/office/powerpoint/2012/main" timeZoneBias="0"/>
       </p:ext>
       <p:ext uri="http://customooxmlschemas.google.com/">
-        <go:slidesCustomData xmlns:go="http://customooxmlschemas.google.com/" xmlns:ahyp="http://schemas.microsoft.com/office/drawing/2018/hyperlinkcolor" xmlns:p15="http://schemas.microsoft.com/office/powerpoint/2012/main" xmlns:p14="http://schemas.microsoft.com/office/powerpoint/2010/main" xmlns:com="http://schemas.openxmlformats.org/drawingml/2006/compatibility" xmlns:pvml="urn:schemas-microsoft-com:office:powerpoint" xmlns:v="urn:schemas-microsoft-com:vml" xmlns:o="urn:schemas-microsoft-com:office:office" xmlns:dgm="http://schemas.openxmlformats.org/drawingml/2006/diagram" xmlns:c="http://schemas.openxmlformats.org/drawingml/2006/chart" xmlns:mv="urn:schemas-microsoft-com:mac:vml" xmlns:mc="http://schemas.openxmlformats.org/markup-compatibility/2006" xmlns="" commentPostId="AAAA5OCWugw"/>
+        <go:slidesCustomData xmlns="" xmlns:mc="http://schemas.openxmlformats.org/markup-compatibility/2006" xmlns:mv="urn:schemas-microsoft-com:mac:vml" xmlns:c="http://schemas.openxmlformats.org/drawingml/2006/chart" xmlns:dgm="http://schemas.openxmlformats.org/drawingml/2006/diagram" xmlns:o="urn:schemas-microsoft-com:office:office" xmlns:v="urn:schemas-microsoft-com:vml" xmlns:pvml="urn:schemas-microsoft-com:office:powerpoint" xmlns:com="http://schemas.openxmlformats.org/drawingml/2006/compatibility" xmlns:p14="http://schemas.microsoft.com/office/powerpoint/2010/main" xmlns:p15="http://schemas.microsoft.com/office/powerpoint/2012/main" xmlns:ahyp="http://schemas.microsoft.com/office/drawing/2018/hyperlinkcolor" xmlns:go="http://customooxmlschemas.google.com/" commentPostId="AAAA5OCWugw"/>
       </p:ext>
     </p:extLst>
   </p:cm>
@@ -14419,7 +14419,7 @@
         <p:push/>
       </p:transition>
     </mc:Choice>
-    <mc:Fallback xmlns:ahyp="http://schemas.microsoft.com/office/drawing/2018/hyperlinkcolor" xmlns:p15="http://schemas.microsoft.com/office/powerpoint/2012/main" xmlns:com="http://schemas.openxmlformats.org/drawingml/2006/compatibility" xmlns:pvml="urn:schemas-microsoft-com:office:powerpoint" xmlns:v="urn:schemas-microsoft-com:vml" xmlns:o="urn:schemas-microsoft-com:office:office" xmlns:dgm="http://schemas.openxmlformats.org/drawingml/2006/diagram" xmlns:c="http://schemas.openxmlformats.org/drawingml/2006/chart" xmlns:mv="urn:schemas-microsoft-com:mac:vml" xmlns="">
+    <mc:Fallback xmlns="" xmlns:mv="urn:schemas-microsoft-com:mac:vml" xmlns:c="http://schemas.openxmlformats.org/drawingml/2006/chart" xmlns:dgm="http://schemas.openxmlformats.org/drawingml/2006/diagram" xmlns:o="urn:schemas-microsoft-com:office:office" xmlns:v="urn:schemas-microsoft-com:vml" xmlns:pvml="urn:schemas-microsoft-com:office:powerpoint" xmlns:com="http://schemas.openxmlformats.org/drawingml/2006/compatibility" xmlns:p15="http://schemas.microsoft.com/office/powerpoint/2012/main" xmlns:ahyp="http://schemas.microsoft.com/office/drawing/2018/hyperlinkcolor">
       <p:transition spd="slow">
         <p:fade/>
       </p:transition>
@@ -14960,7 +14960,7 @@
         <p:push/>
       </p:transition>
     </mc:Choice>
-    <mc:Fallback xmlns:ahyp="http://schemas.microsoft.com/office/drawing/2018/hyperlinkcolor" xmlns:p15="http://schemas.microsoft.com/office/powerpoint/2012/main" xmlns:com="http://schemas.openxmlformats.org/drawingml/2006/compatibility" xmlns:pvml="urn:schemas-microsoft-com:office:powerpoint" xmlns:v="urn:schemas-microsoft-com:vml" xmlns:o="urn:schemas-microsoft-com:office:office" xmlns:dgm="http://schemas.openxmlformats.org/drawingml/2006/diagram" xmlns:c="http://schemas.openxmlformats.org/drawingml/2006/chart" xmlns:mv="urn:schemas-microsoft-com:mac:vml" xmlns="">
+    <mc:Fallback xmlns="" xmlns:mv="urn:schemas-microsoft-com:mac:vml" xmlns:c="http://schemas.openxmlformats.org/drawingml/2006/chart" xmlns:dgm="http://schemas.openxmlformats.org/drawingml/2006/diagram" xmlns:o="urn:schemas-microsoft-com:office:office" xmlns:v="urn:schemas-microsoft-com:vml" xmlns:pvml="urn:schemas-microsoft-com:office:powerpoint" xmlns:com="http://schemas.openxmlformats.org/drawingml/2006/compatibility" xmlns:p15="http://schemas.microsoft.com/office/powerpoint/2012/main" xmlns:ahyp="http://schemas.microsoft.com/office/drawing/2018/hyperlinkcolor">
       <p:transition spd="slow">
         <p:fade/>
       </p:transition>
@@ -16247,7 +16247,7 @@
         <p:push/>
       </p:transition>
     </mc:Choice>
-    <mc:Fallback xmlns:ahyp="http://schemas.microsoft.com/office/drawing/2018/hyperlinkcolor" xmlns:p15="http://schemas.microsoft.com/office/powerpoint/2012/main" xmlns:com="http://schemas.openxmlformats.org/drawingml/2006/compatibility" xmlns:pvml="urn:schemas-microsoft-com:office:powerpoint" xmlns:v="urn:schemas-microsoft-com:vml" xmlns:o="urn:schemas-microsoft-com:office:office" xmlns:dgm="http://schemas.openxmlformats.org/drawingml/2006/diagram" xmlns:c="http://schemas.openxmlformats.org/drawingml/2006/chart" xmlns:mv="urn:schemas-microsoft-com:mac:vml" xmlns="">
+    <mc:Fallback xmlns="" xmlns:mv="urn:schemas-microsoft-com:mac:vml" xmlns:c="http://schemas.openxmlformats.org/drawingml/2006/chart" xmlns:dgm="http://schemas.openxmlformats.org/drawingml/2006/diagram" xmlns:o="urn:schemas-microsoft-com:office:office" xmlns:v="urn:schemas-microsoft-com:vml" xmlns:pvml="urn:schemas-microsoft-com:office:powerpoint" xmlns:com="http://schemas.openxmlformats.org/drawingml/2006/compatibility" xmlns:p15="http://schemas.microsoft.com/office/powerpoint/2012/main" xmlns:ahyp="http://schemas.microsoft.com/office/drawing/2018/hyperlinkcolor">
       <p:transition spd="slow">
         <p:fade/>
       </p:transition>
@@ -16876,7 +16876,7 @@
         </p:blipFill>
         <p:spPr>
           <a:xfrm>
-            <a:off x="6702425" y="1344930"/>
+            <a:off x="6702425" y="1364594"/>
             <a:ext cx="4895850" cy="4457700"/>
           </a:xfrm>
           <a:prstGeom prst="rect">
@@ -17434,7 +17434,7 @@
         <p:push/>
       </p:transition>
     </mc:Choice>
-    <mc:Fallback xmlns:ahyp="http://schemas.microsoft.com/office/drawing/2018/hyperlinkcolor" xmlns:p15="http://schemas.microsoft.com/office/powerpoint/2012/main" xmlns:com="http://schemas.openxmlformats.org/drawingml/2006/compatibility" xmlns:pvml="urn:schemas-microsoft-com:office:powerpoint" xmlns:v="urn:schemas-microsoft-com:vml" xmlns:o="urn:schemas-microsoft-com:office:office" xmlns:dgm="http://schemas.openxmlformats.org/drawingml/2006/diagram" xmlns:c="http://schemas.openxmlformats.org/drawingml/2006/chart" xmlns:mv="urn:schemas-microsoft-com:mac:vml" xmlns="">
+    <mc:Fallback xmlns="" xmlns:mv="urn:schemas-microsoft-com:mac:vml" xmlns:c="http://schemas.openxmlformats.org/drawingml/2006/chart" xmlns:dgm="http://schemas.openxmlformats.org/drawingml/2006/diagram" xmlns:o="urn:schemas-microsoft-com:office:office" xmlns:v="urn:schemas-microsoft-com:vml" xmlns:pvml="urn:schemas-microsoft-com:office:powerpoint" xmlns:com="http://schemas.openxmlformats.org/drawingml/2006/compatibility" xmlns:p15="http://schemas.microsoft.com/office/powerpoint/2012/main" xmlns:ahyp="http://schemas.microsoft.com/office/drawing/2018/hyperlinkcolor">
       <p:transition spd="slow">
         <p:fade/>
       </p:transition>
@@ -18737,7 +18737,7 @@
         <p:push/>
       </p:transition>
     </mc:Choice>
-    <mc:Fallback xmlns:ahyp="http://schemas.microsoft.com/office/drawing/2018/hyperlinkcolor" xmlns:p15="http://schemas.microsoft.com/office/powerpoint/2012/main" xmlns:com="http://schemas.openxmlformats.org/drawingml/2006/compatibility" xmlns:pvml="urn:schemas-microsoft-com:office:powerpoint" xmlns:v="urn:schemas-microsoft-com:vml" xmlns:o="urn:schemas-microsoft-com:office:office" xmlns:dgm="http://schemas.openxmlformats.org/drawingml/2006/diagram" xmlns:c="http://schemas.openxmlformats.org/drawingml/2006/chart" xmlns:mv="urn:schemas-microsoft-com:mac:vml" xmlns="">
+    <mc:Fallback xmlns="" xmlns:mv="urn:schemas-microsoft-com:mac:vml" xmlns:c="http://schemas.openxmlformats.org/drawingml/2006/chart" xmlns:dgm="http://schemas.openxmlformats.org/drawingml/2006/diagram" xmlns:o="urn:schemas-microsoft-com:office:office" xmlns:v="urn:schemas-microsoft-com:vml" xmlns:pvml="urn:schemas-microsoft-com:office:powerpoint" xmlns:com="http://schemas.openxmlformats.org/drawingml/2006/compatibility" xmlns:p15="http://schemas.microsoft.com/office/powerpoint/2012/main" xmlns:ahyp="http://schemas.microsoft.com/office/drawing/2018/hyperlinkcolor">
       <p:transition spd="slow">
         <p:fade/>
       </p:transition>
@@ -19448,7 +19448,7 @@
         <p:push/>
       </p:transition>
     </mc:Choice>
-    <mc:Fallback xmlns:ahyp="http://schemas.microsoft.com/office/drawing/2018/hyperlinkcolor" xmlns:p15="http://schemas.microsoft.com/office/powerpoint/2012/main" xmlns:com="http://schemas.openxmlformats.org/drawingml/2006/compatibility" xmlns:pvml="urn:schemas-microsoft-com:office:powerpoint" xmlns:v="urn:schemas-microsoft-com:vml" xmlns:o="urn:schemas-microsoft-com:office:office" xmlns:dgm="http://schemas.openxmlformats.org/drawingml/2006/diagram" xmlns:c="http://schemas.openxmlformats.org/drawingml/2006/chart" xmlns:mv="urn:schemas-microsoft-com:mac:vml" xmlns="">
+    <mc:Fallback xmlns="" xmlns:mv="urn:schemas-microsoft-com:mac:vml" xmlns:c="http://schemas.openxmlformats.org/drawingml/2006/chart" xmlns:dgm="http://schemas.openxmlformats.org/drawingml/2006/diagram" xmlns:o="urn:schemas-microsoft-com:office:office" xmlns:v="urn:schemas-microsoft-com:vml" xmlns:pvml="urn:schemas-microsoft-com:office:powerpoint" xmlns:com="http://schemas.openxmlformats.org/drawingml/2006/compatibility" xmlns:p15="http://schemas.microsoft.com/office/powerpoint/2012/main" xmlns:ahyp="http://schemas.microsoft.com/office/drawing/2018/hyperlinkcolor">
       <p:transition spd="slow">
         <p:fade/>
       </p:transition>
@@ -19993,7 +19993,7 @@
               <a:t>Contains the code that always executes, whether or not any </a:t>
             </a:r>
             <a:r>
-              <a:rPr lang="en-IN" sz="2200" dirty="0" err="1">
+              <a:rPr lang="en-IN" sz="2200" dirty="0" smtClean="0">
                 <a:solidFill>
                   <a:schemeClr val="lt1"/>
                 </a:solidFill>
@@ -20002,31 +20002,7 @@
                 <a:cs typeface="Calibri"/>
                 <a:sym typeface="Calibri"/>
               </a:rPr>
-              <a:t>exceptin</a:t>
-            </a:r>
-            <a:r>
-              <a:rPr lang="en-IN" sz="2200" dirty="0">
-                <a:solidFill>
-                  <a:schemeClr val="lt1"/>
-                </a:solidFill>
-                <a:latin typeface="Calibri"/>
-                <a:ea typeface="Calibri"/>
-                <a:cs typeface="Calibri"/>
-                <a:sym typeface="Calibri"/>
-              </a:rPr>
-              <a:t> </a:t>
-            </a:r>
-            <a:r>
-              <a:rPr lang="en-IN" sz="2200" dirty="0" err="1">
-                <a:solidFill>
-                  <a:schemeClr val="lt1"/>
-                </a:solidFill>
-                <a:latin typeface="Calibri"/>
-                <a:ea typeface="Calibri"/>
-                <a:cs typeface="Calibri"/>
-                <a:sym typeface="Calibri"/>
-              </a:rPr>
-              <a:t>ocurs</a:t>
+              <a:t>exception occurs</a:t>
             </a:r>
             <a:r>
               <a:rPr lang="en-IN" sz="2200" dirty="0">
@@ -20700,7 +20676,7 @@
         <p:push/>
       </p:transition>
     </mc:Choice>
-    <mc:Fallback xmlns:ahyp="http://schemas.microsoft.com/office/drawing/2018/hyperlinkcolor" xmlns:p15="http://schemas.microsoft.com/office/powerpoint/2012/main" xmlns:com="http://schemas.openxmlformats.org/drawingml/2006/compatibility" xmlns:pvml="urn:schemas-microsoft-com:office:powerpoint" xmlns:v="urn:schemas-microsoft-com:vml" xmlns:o="urn:schemas-microsoft-com:office:office" xmlns:dgm="http://schemas.openxmlformats.org/drawingml/2006/diagram" xmlns:c="http://schemas.openxmlformats.org/drawingml/2006/chart" xmlns:mv="urn:schemas-microsoft-com:mac:vml" xmlns="">
+    <mc:Fallback xmlns="" xmlns:mv="urn:schemas-microsoft-com:mac:vml" xmlns:c="http://schemas.openxmlformats.org/drawingml/2006/chart" xmlns:dgm="http://schemas.openxmlformats.org/drawingml/2006/diagram" xmlns:o="urn:schemas-microsoft-com:office:office" xmlns:v="urn:schemas-microsoft-com:vml" xmlns:pvml="urn:schemas-microsoft-com:office:powerpoint" xmlns:com="http://schemas.openxmlformats.org/drawingml/2006/compatibility" xmlns:p15="http://schemas.microsoft.com/office/powerpoint/2012/main" xmlns:ahyp="http://schemas.microsoft.com/office/drawing/2018/hyperlinkcolor">
       <p:transition spd="slow">
         <p:fade/>
       </p:transition>
@@ -20939,7 +20915,7 @@
               <a:buNone/>
             </a:pPr>
             <a:r>
-              <a:rPr lang="en-IN">
+              <a:rPr lang="en-IN" dirty="0">
                 <a:solidFill>
                   <a:srgbClr val="002060"/>
                 </a:solidFill>
@@ -20950,7 +20926,7 @@
               </a:rPr>
               <a:t>Application Exception</a:t>
             </a:r>
-            <a:endParaRPr>
+            <a:endParaRPr dirty="0">
               <a:solidFill>
                 <a:srgbClr val="002060"/>
               </a:solidFill>
@@ -21053,7 +21029,7 @@
               <a:buNone/>
             </a:pPr>
             <a:r>
-              <a:rPr lang="en-IN" sz="2200">
+              <a:rPr lang="en-IN" sz="2200" dirty="0">
                 <a:solidFill>
                   <a:schemeClr val="lt1"/>
                 </a:solidFill>
@@ -21064,7 +21040,7 @@
               </a:rPr>
               <a:t>Thrown by a user program, not by the common language runtime</a:t>
             </a:r>
-            <a:endParaRPr sz="2200">
+            <a:endParaRPr sz="2200" dirty="0">
               <a:solidFill>
                 <a:schemeClr val="lt1"/>
               </a:solidFill>
@@ -22382,7 +22358,7 @@
         <p:push/>
       </p:transition>
     </mc:Choice>
-    <mc:Fallback xmlns:ahyp="http://schemas.microsoft.com/office/drawing/2018/hyperlinkcolor" xmlns:p15="http://schemas.microsoft.com/office/powerpoint/2012/main" xmlns:com="http://schemas.openxmlformats.org/drawingml/2006/compatibility" xmlns:pvml="urn:schemas-microsoft-com:office:powerpoint" xmlns:v="urn:schemas-microsoft-com:vml" xmlns:o="urn:schemas-microsoft-com:office:office" xmlns:dgm="http://schemas.openxmlformats.org/drawingml/2006/diagram" xmlns:c="http://schemas.openxmlformats.org/drawingml/2006/chart" xmlns:mv="urn:schemas-microsoft-com:mac:vml" xmlns="">
+    <mc:Fallback xmlns="" xmlns:mv="urn:schemas-microsoft-com:mac:vml" xmlns:c="http://schemas.openxmlformats.org/drawingml/2006/chart" xmlns:dgm="http://schemas.openxmlformats.org/drawingml/2006/diagram" xmlns:o="urn:schemas-microsoft-com:office:office" xmlns:v="urn:schemas-microsoft-com:vml" xmlns:pvml="urn:schemas-microsoft-com:office:powerpoint" xmlns:com="http://schemas.openxmlformats.org/drawingml/2006/compatibility" xmlns:p15="http://schemas.microsoft.com/office/powerpoint/2012/main" xmlns:ahyp="http://schemas.microsoft.com/office/drawing/2018/hyperlinkcolor">
       <p:transition spd="slow">
         <p:fade/>
       </p:transition>
@@ -23483,7 +23459,7 @@
         <p:push/>
       </p:transition>
     </mc:Choice>
-    <mc:Fallback xmlns:ahyp="http://schemas.microsoft.com/office/drawing/2018/hyperlinkcolor" xmlns:p15="http://schemas.microsoft.com/office/powerpoint/2012/main" xmlns:com="http://schemas.openxmlformats.org/drawingml/2006/compatibility" xmlns:pvml="urn:schemas-microsoft-com:office:powerpoint" xmlns:v="urn:schemas-microsoft-com:vml" xmlns:o="urn:schemas-microsoft-com:office:office" xmlns:dgm="http://schemas.openxmlformats.org/drawingml/2006/diagram" xmlns:c="http://schemas.openxmlformats.org/drawingml/2006/chart" xmlns:mv="urn:schemas-microsoft-com:mac:vml" xmlns="">
+    <mc:Fallback xmlns="" xmlns:mv="urn:schemas-microsoft-com:mac:vml" xmlns:c="http://schemas.openxmlformats.org/drawingml/2006/chart" xmlns:dgm="http://schemas.openxmlformats.org/drawingml/2006/diagram" xmlns:o="urn:schemas-microsoft-com:office:office" xmlns:v="urn:schemas-microsoft-com:vml" xmlns:pvml="urn:schemas-microsoft-com:office:powerpoint" xmlns:com="http://schemas.openxmlformats.org/drawingml/2006/compatibility" xmlns:p15="http://schemas.microsoft.com/office/powerpoint/2012/main" xmlns:ahyp="http://schemas.microsoft.com/office/drawing/2018/hyperlinkcolor">
       <p:transition spd="slow">
         <p:fade/>
       </p:transition>
@@ -24664,7 +24640,7 @@
         <p:push/>
       </p:transition>
     </mc:Choice>
-    <mc:Fallback xmlns:ahyp="http://schemas.microsoft.com/office/drawing/2018/hyperlinkcolor" xmlns:p15="http://schemas.microsoft.com/office/powerpoint/2012/main" xmlns:com="http://schemas.openxmlformats.org/drawingml/2006/compatibility" xmlns:pvml="urn:schemas-microsoft-com:office:powerpoint" xmlns:v="urn:schemas-microsoft-com:vml" xmlns:o="urn:schemas-microsoft-com:office:office" xmlns:dgm="http://schemas.openxmlformats.org/drawingml/2006/diagram" xmlns:c="http://schemas.openxmlformats.org/drawingml/2006/chart" xmlns:mv="urn:schemas-microsoft-com:mac:vml" xmlns="">
+    <mc:Fallback xmlns="" xmlns:mv="urn:schemas-microsoft-com:mac:vml" xmlns:c="http://schemas.openxmlformats.org/drawingml/2006/chart" xmlns:dgm="http://schemas.openxmlformats.org/drawingml/2006/diagram" xmlns:o="urn:schemas-microsoft-com:office:office" xmlns:v="urn:schemas-microsoft-com:vml" xmlns:pvml="urn:schemas-microsoft-com:office:powerpoint" xmlns:com="http://schemas.openxmlformats.org/drawingml/2006/compatibility" xmlns:p15="http://schemas.microsoft.com/office/powerpoint/2012/main" xmlns:ahyp="http://schemas.microsoft.com/office/drawing/2018/hyperlinkcolor">
       <p:transition spd="slow">
         <p:fade/>
       </p:transition>
@@ -25307,7 +25283,7 @@
         <p:push/>
       </p:transition>
     </mc:Choice>
-    <mc:Fallback xmlns:ahyp="http://schemas.microsoft.com/office/drawing/2018/hyperlinkcolor" xmlns:p15="http://schemas.microsoft.com/office/powerpoint/2012/main" xmlns:com="http://schemas.openxmlformats.org/drawingml/2006/compatibility" xmlns:pvml="urn:schemas-microsoft-com:office:powerpoint" xmlns:v="urn:schemas-microsoft-com:vml" xmlns:o="urn:schemas-microsoft-com:office:office" xmlns:dgm="http://schemas.openxmlformats.org/drawingml/2006/diagram" xmlns:c="http://schemas.openxmlformats.org/drawingml/2006/chart" xmlns:mv="urn:schemas-microsoft-com:mac:vml" xmlns="">
+    <mc:Fallback xmlns="" xmlns:mv="urn:schemas-microsoft-com:mac:vml" xmlns:c="http://schemas.openxmlformats.org/drawingml/2006/chart" xmlns:dgm="http://schemas.openxmlformats.org/drawingml/2006/diagram" xmlns:o="urn:schemas-microsoft-com:office:office" xmlns:v="urn:schemas-microsoft-com:vml" xmlns:pvml="urn:schemas-microsoft-com:office:powerpoint" xmlns:com="http://schemas.openxmlformats.org/drawingml/2006/compatibility" xmlns:p15="http://schemas.microsoft.com/office/powerpoint/2012/main" xmlns:ahyp="http://schemas.microsoft.com/office/drawing/2018/hyperlinkcolor">
       <p:transition spd="slow">
         <p:fade/>
       </p:transition>
@@ -25998,7 +25974,7 @@
         <p:push/>
       </p:transition>
     </mc:Choice>
-    <mc:Fallback xmlns:ahyp="http://schemas.microsoft.com/office/drawing/2018/hyperlinkcolor" xmlns:p15="http://schemas.microsoft.com/office/powerpoint/2012/main" xmlns:com="http://schemas.openxmlformats.org/drawingml/2006/compatibility" xmlns:pvml="urn:schemas-microsoft-com:office:powerpoint" xmlns:v="urn:schemas-microsoft-com:vml" xmlns:o="urn:schemas-microsoft-com:office:office" xmlns:dgm="http://schemas.openxmlformats.org/drawingml/2006/diagram" xmlns:c="http://schemas.openxmlformats.org/drawingml/2006/chart" xmlns:mv="urn:schemas-microsoft-com:mac:vml" xmlns="">
+    <mc:Fallback xmlns="" xmlns:mv="urn:schemas-microsoft-com:mac:vml" xmlns:c="http://schemas.openxmlformats.org/drawingml/2006/chart" xmlns:dgm="http://schemas.openxmlformats.org/drawingml/2006/diagram" xmlns:o="urn:schemas-microsoft-com:office:office" xmlns:v="urn:schemas-microsoft-com:vml" xmlns:pvml="urn:schemas-microsoft-com:office:powerpoint" xmlns:com="http://schemas.openxmlformats.org/drawingml/2006/compatibility" xmlns:p15="http://schemas.microsoft.com/office/powerpoint/2012/main" xmlns:ahyp="http://schemas.microsoft.com/office/drawing/2018/hyperlinkcolor">
       <p:transition spd="slow">
         <p:fade/>
       </p:transition>
@@ -26263,7 +26239,7 @@
         <p:push/>
       </p:transition>
     </mc:Choice>
-    <mc:Fallback xmlns:ahyp="http://schemas.microsoft.com/office/drawing/2018/hyperlinkcolor" xmlns:p15="http://schemas.microsoft.com/office/powerpoint/2012/main" xmlns:com="http://schemas.openxmlformats.org/drawingml/2006/compatibility" xmlns:pvml="urn:schemas-microsoft-com:office:powerpoint" xmlns:v="urn:schemas-microsoft-com:vml" xmlns:o="urn:schemas-microsoft-com:office:office" xmlns:dgm="http://schemas.openxmlformats.org/drawingml/2006/diagram" xmlns:c="http://schemas.openxmlformats.org/drawingml/2006/chart" xmlns:mv="urn:schemas-microsoft-com:mac:vml" xmlns="">
+    <mc:Fallback xmlns="" xmlns:mv="urn:schemas-microsoft-com:mac:vml" xmlns:c="http://schemas.openxmlformats.org/drawingml/2006/chart" xmlns:dgm="http://schemas.openxmlformats.org/drawingml/2006/diagram" xmlns:o="urn:schemas-microsoft-com:office:office" xmlns:v="urn:schemas-microsoft-com:vml" xmlns:pvml="urn:schemas-microsoft-com:office:powerpoint" xmlns:com="http://schemas.openxmlformats.org/drawingml/2006/compatibility" xmlns:p15="http://schemas.microsoft.com/office/powerpoint/2012/main" xmlns:ahyp="http://schemas.microsoft.com/office/drawing/2018/hyperlinkcolor">
       <p:transition spd="slow">
         <p:fade/>
       </p:transition>
@@ -26694,7 +26670,7 @@
         <p:push/>
       </p:transition>
     </mc:Choice>
-    <mc:Fallback xmlns:ahyp="http://schemas.microsoft.com/office/drawing/2018/hyperlinkcolor" xmlns:p15="http://schemas.microsoft.com/office/powerpoint/2012/main" xmlns:com="http://schemas.openxmlformats.org/drawingml/2006/compatibility" xmlns:pvml="urn:schemas-microsoft-com:office:powerpoint" xmlns:v="urn:schemas-microsoft-com:vml" xmlns:o="urn:schemas-microsoft-com:office:office" xmlns:dgm="http://schemas.openxmlformats.org/drawingml/2006/diagram" xmlns:c="http://schemas.openxmlformats.org/drawingml/2006/chart" xmlns:mv="urn:schemas-microsoft-com:mac:vml" xmlns="">
+    <mc:Fallback xmlns="" xmlns:mv="urn:schemas-microsoft-com:mac:vml" xmlns:c="http://schemas.openxmlformats.org/drawingml/2006/chart" xmlns:dgm="http://schemas.openxmlformats.org/drawingml/2006/diagram" xmlns:o="urn:schemas-microsoft-com:office:office" xmlns:v="urn:schemas-microsoft-com:vml" xmlns:pvml="urn:schemas-microsoft-com:office:powerpoint" xmlns:com="http://schemas.openxmlformats.org/drawingml/2006/compatibility" xmlns:p15="http://schemas.microsoft.com/office/powerpoint/2012/main" xmlns:ahyp="http://schemas.microsoft.com/office/drawing/2018/hyperlinkcolor">
       <p:transition spd="slow">
         <p:fade/>
       </p:transition>
@@ -27515,7 +27491,7 @@
         <p:push/>
       </p:transition>
     </mc:Choice>
-    <mc:Fallback xmlns:ahyp="http://schemas.microsoft.com/office/drawing/2018/hyperlinkcolor" xmlns:p15="http://schemas.microsoft.com/office/powerpoint/2012/main" xmlns:com="http://schemas.openxmlformats.org/drawingml/2006/compatibility" xmlns:pvml="urn:schemas-microsoft-com:office:powerpoint" xmlns:v="urn:schemas-microsoft-com:vml" xmlns:o="urn:schemas-microsoft-com:office:office" xmlns:dgm="http://schemas.openxmlformats.org/drawingml/2006/diagram" xmlns:c="http://schemas.openxmlformats.org/drawingml/2006/chart" xmlns:mv="urn:schemas-microsoft-com:mac:vml" xmlns="">
+    <mc:Fallback xmlns="" xmlns:mv="urn:schemas-microsoft-com:mac:vml" xmlns:c="http://schemas.openxmlformats.org/drawingml/2006/chart" xmlns:dgm="http://schemas.openxmlformats.org/drawingml/2006/diagram" xmlns:o="urn:schemas-microsoft-com:office:office" xmlns:v="urn:schemas-microsoft-com:vml" xmlns:pvml="urn:schemas-microsoft-com:office:powerpoint" xmlns:com="http://schemas.openxmlformats.org/drawingml/2006/compatibility" xmlns:p15="http://schemas.microsoft.com/office/powerpoint/2012/main" xmlns:ahyp="http://schemas.microsoft.com/office/drawing/2018/hyperlinkcolor">
       <p:transition spd="slow">
         <p:fade/>
       </p:transition>
@@ -28389,7 +28365,7 @@
         <p:push/>
       </p:transition>
     </mc:Choice>
-    <mc:Fallback xmlns:ahyp="http://schemas.microsoft.com/office/drawing/2018/hyperlinkcolor" xmlns:p15="http://schemas.microsoft.com/office/powerpoint/2012/main" xmlns:com="http://schemas.openxmlformats.org/drawingml/2006/compatibility" xmlns:pvml="urn:schemas-microsoft-com:office:powerpoint" xmlns:v="urn:schemas-microsoft-com:vml" xmlns:o="urn:schemas-microsoft-com:office:office" xmlns:dgm="http://schemas.openxmlformats.org/drawingml/2006/diagram" xmlns:c="http://schemas.openxmlformats.org/drawingml/2006/chart" xmlns:mv="urn:schemas-microsoft-com:mac:vml" xmlns="">
+    <mc:Fallback xmlns="" xmlns:mv="urn:schemas-microsoft-com:mac:vml" xmlns:c="http://schemas.openxmlformats.org/drawingml/2006/chart" xmlns:dgm="http://schemas.openxmlformats.org/drawingml/2006/diagram" xmlns:o="urn:schemas-microsoft-com:office:office" xmlns:v="urn:schemas-microsoft-com:vml" xmlns:pvml="urn:schemas-microsoft-com:office:powerpoint" xmlns:com="http://schemas.openxmlformats.org/drawingml/2006/compatibility" xmlns:p15="http://schemas.microsoft.com/office/powerpoint/2012/main" xmlns:ahyp="http://schemas.microsoft.com/office/drawing/2018/hyperlinkcolor">
       <p:transition spd="slow">
         <p:fade/>
       </p:transition>
@@ -29504,7 +29480,7 @@
               <a:buNone/>
             </a:pPr>
             <a:r>
-              <a:rPr lang="en-IN" sz="4400">
+              <a:rPr lang="en-IN" sz="4400" dirty="0">
                 <a:solidFill>
                   <a:srgbClr val="002060"/>
                 </a:solidFill>
@@ -29515,7 +29491,7 @@
               </a:rPr>
               <a:t>TYPES OF EXCEPTION</a:t>
             </a:r>
-            <a:endParaRPr sz="4400">
+            <a:endParaRPr sz="4400" dirty="0">
               <a:solidFill>
                 <a:srgbClr val="002060"/>
               </a:solidFill>
@@ -29619,7 +29595,7 @@
               <a:buNone/>
             </a:pPr>
             <a:r>
-              <a:rPr lang="en-IN" sz="2000">
+              <a:rPr lang="en-IN" sz="2000" dirty="0">
                 <a:solidFill>
                   <a:schemeClr val="lt1"/>
                 </a:solidFill>
@@ -29630,7 +29606,7 @@
               </a:rPr>
               <a:t>SYSTEM EXCEPTION</a:t>
             </a:r>
-            <a:endParaRPr sz="2000">
+            <a:endParaRPr sz="2000" dirty="0">
               <a:solidFill>
                 <a:schemeClr val="lt1"/>
               </a:solidFill>
@@ -29736,7 +29712,7 @@
               <a:buNone/>
             </a:pPr>
             <a:r>
-              <a:rPr lang="en-IN" sz="2000">
+              <a:rPr lang="en-IN" sz="2000" dirty="0">
                 <a:solidFill>
                   <a:schemeClr val="lt1"/>
                 </a:solidFill>
@@ -29747,7 +29723,7 @@
               </a:rPr>
               <a:t>APPLICATION EXCEPTION</a:t>
             </a:r>
-            <a:endParaRPr sz="2000">
+            <a:endParaRPr sz="2000" dirty="0">
               <a:solidFill>
                 <a:schemeClr val="lt1"/>
               </a:solidFill>
@@ -29794,7 +29770,7 @@
               <a:buNone/>
             </a:pPr>
             <a:r>
-              <a:rPr lang="en-IN" sz="1800">
+              <a:rPr lang="en-IN" sz="1800" dirty="0">
                 <a:solidFill>
                   <a:srgbClr val="0070C0"/>
                 </a:solidFill>
@@ -29806,7 +29782,7 @@
               <a:t>		</a:t>
             </a:r>
             <a:r>
-              <a:rPr lang="en-IN" sz="2000">
+              <a:rPr lang="en-IN" sz="2000" dirty="0">
                 <a:solidFill>
                   <a:srgbClr val="0070C0"/>
                 </a:solidFill>
@@ -29818,7 +29794,7 @@
               <a:t>Thrown By </a:t>
             </a:r>
             <a:r>
-              <a:rPr lang="en-IN" sz="2000">
+              <a:rPr lang="en-IN" sz="2000" dirty="0" err="1">
                 <a:solidFill>
                   <a:srgbClr val="0070C0"/>
                 </a:solidFill>
@@ -29826,7 +29802,7 @@
               <a:t>Application</a:t>
             </a:r>
             <a:r>
-              <a:rPr lang="en-IN" sz="2000">
+              <a:rPr lang="en-IN" sz="2000" dirty="0" err="1">
                 <a:solidFill>
                   <a:srgbClr val="0070C0"/>
                 </a:solidFill>
@@ -29835,9 +29811,21 @@
                 <a:cs typeface="Arial"/>
                 <a:sym typeface="Arial"/>
               </a:rPr>
-              <a:t>,using “throw” Clause</a:t>
+              <a:t>,using</a:t>
             </a:r>
-            <a:endParaRPr sz="2000">
+            <a:r>
+              <a:rPr lang="en-IN" sz="2000" dirty="0">
+                <a:solidFill>
+                  <a:srgbClr val="0070C0"/>
+                </a:solidFill>
+                <a:latin typeface="Arial"/>
+                <a:ea typeface="Arial"/>
+                <a:cs typeface="Arial"/>
+                <a:sym typeface="Arial"/>
+              </a:rPr>
+              <a:t> “throw” Clause</a:t>
+            </a:r>
+            <a:endParaRPr sz="2000" dirty="0">
               <a:solidFill>
                 <a:srgbClr val="0070C0"/>
               </a:solidFill>
@@ -29985,7 +29973,7 @@
         <p:push/>
       </p:transition>
     </mc:Choice>
-    <mc:Fallback xmlns:ahyp="http://schemas.microsoft.com/office/drawing/2018/hyperlinkcolor" xmlns:p15="http://schemas.microsoft.com/office/powerpoint/2012/main" xmlns:com="http://schemas.openxmlformats.org/drawingml/2006/compatibility" xmlns:pvml="urn:schemas-microsoft-com:office:powerpoint" xmlns:v="urn:schemas-microsoft-com:vml" xmlns:o="urn:schemas-microsoft-com:office:office" xmlns:dgm="http://schemas.openxmlformats.org/drawingml/2006/diagram" xmlns:c="http://schemas.openxmlformats.org/drawingml/2006/chart" xmlns:mv="urn:schemas-microsoft-com:mac:vml" xmlns="">
+    <mc:Fallback xmlns="" xmlns:mv="urn:schemas-microsoft-com:mac:vml" xmlns:c="http://schemas.openxmlformats.org/drawingml/2006/chart" xmlns:dgm="http://schemas.openxmlformats.org/drawingml/2006/diagram" xmlns:o="urn:schemas-microsoft-com:office:office" xmlns:v="urn:schemas-microsoft-com:vml" xmlns:pvml="urn:schemas-microsoft-com:office:powerpoint" xmlns:com="http://schemas.openxmlformats.org/drawingml/2006/compatibility" xmlns:p15="http://schemas.microsoft.com/office/powerpoint/2012/main" xmlns:ahyp="http://schemas.microsoft.com/office/drawing/2018/hyperlinkcolor">
       <p:transition spd="slow">
         <p:fade/>
       </p:transition>
@@ -30686,7 +30674,7 @@
         <p:push/>
       </p:transition>
     </mc:Choice>
-    <mc:Fallback xmlns:ahyp="http://schemas.microsoft.com/office/drawing/2018/hyperlinkcolor" xmlns:p15="http://schemas.microsoft.com/office/powerpoint/2012/main" xmlns:com="http://schemas.openxmlformats.org/drawingml/2006/compatibility" xmlns:pvml="urn:schemas-microsoft-com:office:powerpoint" xmlns:v="urn:schemas-microsoft-com:vml" xmlns:o="urn:schemas-microsoft-com:office:office" xmlns:dgm="http://schemas.openxmlformats.org/drawingml/2006/diagram" xmlns:c="http://schemas.openxmlformats.org/drawingml/2006/chart" xmlns:mv="urn:schemas-microsoft-com:mac:vml" xmlns="">
+    <mc:Fallback xmlns="" xmlns:mv="urn:schemas-microsoft-com:mac:vml" xmlns:c="http://schemas.openxmlformats.org/drawingml/2006/chart" xmlns:dgm="http://schemas.openxmlformats.org/drawingml/2006/diagram" xmlns:o="urn:schemas-microsoft-com:office:office" xmlns:v="urn:schemas-microsoft-com:vml" xmlns:pvml="urn:schemas-microsoft-com:office:powerpoint" xmlns:com="http://schemas.openxmlformats.org/drawingml/2006/compatibility" xmlns:p15="http://schemas.microsoft.com/office/powerpoint/2012/main" xmlns:ahyp="http://schemas.microsoft.com/office/drawing/2018/hyperlinkcolor">
       <p:transition spd="slow">
         <p:fade/>
       </p:transition>
@@ -31204,7 +31192,7 @@
               <a:buNone/>
             </a:pPr>
             <a:r>
-              <a:rPr lang="en-IN" sz="2400">
+              <a:rPr lang="en-IN" sz="2400" dirty="0" err="1">
                 <a:solidFill>
                   <a:schemeClr val="accent3"/>
                 </a:solidFill>
@@ -31215,7 +31203,7 @@
               </a:rPr>
               <a:t>NullReferenceException</a:t>
             </a:r>
-            <a:endParaRPr sz="2400">
+            <a:endParaRPr sz="2400" dirty="0">
               <a:solidFill>
                 <a:schemeClr val="accent3"/>
               </a:solidFill>
@@ -31235,7 +31223,7 @@
               </a:spcAft>
               <a:buNone/>
             </a:pPr>
-            <a:endParaRPr sz="2400">
+            <a:endParaRPr sz="2400" dirty="0">
               <a:solidFill>
                 <a:schemeClr val="accent3"/>
               </a:solidFill>
@@ -31397,7 +31385,7 @@
               <a:buNone/>
             </a:pPr>
             <a:r>
-              <a:rPr lang="en-IN" sz="2400">
+              <a:rPr lang="en-IN" sz="2400" dirty="0" err="1">
                 <a:solidFill>
                   <a:schemeClr val="accent3"/>
                 </a:solidFill>
@@ -31408,7 +31396,7 @@
               </a:rPr>
               <a:t>InvalidCastException</a:t>
             </a:r>
-            <a:endParaRPr sz="2400">
+            <a:endParaRPr sz="2400" dirty="0">
               <a:solidFill>
                 <a:schemeClr val="accent3"/>
               </a:solidFill>
@@ -31428,7 +31416,7 @@
               </a:spcAft>
               <a:buNone/>
             </a:pPr>
-            <a:endParaRPr sz="2400">
+            <a:endParaRPr sz="2400" dirty="0">
               <a:solidFill>
                 <a:schemeClr val="accent3"/>
               </a:solidFill>
@@ -32683,7 +32671,7 @@
               <a:buNone/>
             </a:pPr>
             <a:r>
-              <a:rPr lang="en-IN" sz="2400">
+              <a:rPr lang="en-IN" sz="2400" dirty="0" err="1">
                 <a:solidFill>
                   <a:schemeClr val="accent3"/>
                 </a:solidFill>
@@ -32694,7 +32682,7 @@
               </a:rPr>
               <a:t>OutOfMemoryException</a:t>
             </a:r>
-            <a:endParaRPr sz="2400">
+            <a:endParaRPr sz="2400" dirty="0">
               <a:solidFill>
                 <a:schemeClr val="accent3"/>
               </a:solidFill>
@@ -32714,7 +32702,7 @@
               </a:spcAft>
               <a:buNone/>
             </a:pPr>
-            <a:endParaRPr sz="2400">
+            <a:endParaRPr sz="2400" dirty="0">
               <a:solidFill>
                 <a:schemeClr val="dk1"/>
               </a:solidFill>
